--- a/06/ppt/06-1_서비스_기획의_기초_v1.pptx
+++ b/06/ppt/06-1_서비스_기획의_기초_v1.pptx
@@ -11891,20 +11891,44 @@
           </a:p>
         </p:txBody>
       </p:sp>
-      <p:sp>
-        <p:nvSpPr>
-          <p:cNvPr id="10" name="Shape 8"/>
-          <p:cNvSpPr/>
-          <p:nvPr/>
-        </p:nvSpPr>
-        <p:spPr>
-          <a:xfrm>
-            <a:off x="530352" y="1965960"/>
-            <a:ext cx="5349240" cy="2286000"/>
+      <p:pic>
+        <p:nvPicPr>
+          <p:cNvPr id="10" name="Image 0" descr="/home/claude/w5/교과서_배포/assets/img/06-1-01-endless-list.png">    </p:cNvPr>
+          <p:cNvPicPr>
+            <a:picLocks noChangeAspect="1"/>
+          </p:cNvPicPr>
+          <p:nvPr/>
+        </p:nvPicPr>
+        <p:blipFill>
+          <a:blip r:embed="rId1"/>
+          <a:stretch>
+            <a:fillRect/>
+          </a:stretch>
+        </p:blipFill>
+        <p:spPr>
+          <a:xfrm>
+            <a:off x="941832" y="1920240"/>
+            <a:ext cx="5852160" cy="3291840"/>
+          </a:xfrm>
+          <a:prstGeom prst="rect">
+            <a:avLst/>
+          </a:prstGeom>
+        </p:spPr>
+      </p:pic>
+      <p:sp>
+        <p:nvSpPr>
+          <p:cNvPr id="11" name="Shape 8"/>
+          <p:cNvSpPr/>
+          <p:nvPr/>
+        </p:nvSpPr>
+        <p:spPr>
+          <a:xfrm>
+            <a:off x="7461504" y="1920240"/>
+            <a:ext cx="4389120" cy="1572768"/>
           </a:xfrm>
           <a:prstGeom prst="roundRect">
             <a:avLst>
-              <a:gd name="adj" fmla="val 2200"/>
+              <a:gd name="adj" fmla="val 3198"/>
             </a:avLst>
           </a:prstGeom>
           <a:solidFill>
@@ -11920,14 +11944,14 @@
       </p:sp>
       <p:sp>
         <p:nvSpPr>
-          <p:cNvPr id="11" name="Text 9"/>
-          <p:cNvSpPr/>
-          <p:nvPr/>
-        </p:nvSpPr>
-        <p:spPr>
-          <a:xfrm>
-            <a:off x="713232" y="2130552"/>
-            <a:ext cx="4983480" cy="237744"/>
+          <p:cNvPr id="12" name="Text 9"/>
+          <p:cNvSpPr/>
+          <p:nvPr/>
+        </p:nvSpPr>
+        <p:spPr>
+          <a:xfrm>
+            <a:off x="7644384" y="2084832"/>
+            <a:ext cx="4023360" cy="237744"/>
           </a:xfrm>
           <a:prstGeom prst="rect">
             <a:avLst/>
@@ -11959,14 +11983,14 @@
       </p:sp>
       <p:sp>
         <p:nvSpPr>
-          <p:cNvPr id="12" name="Text 10"/>
-          <p:cNvSpPr/>
-          <p:nvPr/>
-        </p:nvSpPr>
-        <p:spPr>
-          <a:xfrm>
-            <a:off x="713232" y="2423160"/>
-            <a:ext cx="4983480" cy="402336"/>
+          <p:cNvPr id="13" name="Text 10"/>
+          <p:cNvSpPr/>
+          <p:nvPr/>
+        </p:nvSpPr>
+        <p:spPr>
+          <a:xfrm>
+            <a:off x="7644384" y="2377440"/>
+            <a:ext cx="4023360" cy="402336"/>
           </a:xfrm>
           <a:prstGeom prst="rect">
             <a:avLst/>
@@ -11998,14 +12022,14 @@
       </p:sp>
       <p:sp>
         <p:nvSpPr>
-          <p:cNvPr id="13" name="Text 11"/>
-          <p:cNvSpPr/>
-          <p:nvPr/>
-        </p:nvSpPr>
-        <p:spPr>
-          <a:xfrm>
-            <a:off x="713232" y="2916936"/>
-            <a:ext cx="4983480" cy="1188720"/>
+          <p:cNvPr id="14" name="Text 11"/>
+          <p:cNvSpPr/>
+          <p:nvPr/>
+        </p:nvSpPr>
+        <p:spPr>
+          <a:xfrm>
+            <a:off x="7644384" y="2871216"/>
+            <a:ext cx="4023360" cy="475488"/>
           </a:xfrm>
           <a:prstGeom prst="rect">
             <a:avLst/>
@@ -12024,7 +12048,7 @@
               <a:buNone/>
             </a:pPr>
             <a:r>
-              <a:rPr lang="en-US" sz="1240" dirty="0">
+              <a:rPr lang="en-US" sz="1250" dirty="0">
                 <a:solidFill>
                   <a:srgbClr val="34373D"/>
                 </a:solidFill>
@@ -12032,94 +12056,26 @@
                 <a:ea typeface="IBM Plex Sans KR" pitchFamily="34" charset="-122"/>
                 <a:cs typeface="IBM Plex Sans KR" pitchFamily="34" charset="-120"/>
               </a:rPr>
-              <a:t>로그인 · 알림 · 채팅 · 친구 추가 · 랭킹 · 결제 · 지도 · 통계 …</a:t>
-            </a:r>
-            <a:endParaRPr lang="en-US" sz="1240" dirty="0"/>
-          </a:p>
-          <a:p>
-            <a:pPr indent="0" marL="0">
-              <a:lnSpc>
-                <a:spcPts val="1900"/>
-              </a:lnSpc>
-              <a:buNone/>
-            </a:pPr>
-            <a:endParaRPr lang="en-US" sz="1240" dirty="0"/>
-          </a:p>
-          <a:p>
-            <a:pPr indent="0" marL="0">
-              <a:lnSpc>
-                <a:spcPts val="1900"/>
-              </a:lnSpc>
-              <a:buNone/>
-            </a:pPr>
-            <a:r>
-              <a:rPr lang="en-US" sz="1240" dirty="0">
-                <a:solidFill>
-                  <a:srgbClr val="34373D"/>
-                </a:solidFill>
-                <a:latin typeface="IBM Plex Sans KR" pitchFamily="34" charset="0"/>
-                <a:ea typeface="IBM Plex Sans KR" pitchFamily="34" charset="-122"/>
-                <a:cs typeface="IBM Plex Sans KR" pitchFamily="34" charset="-120"/>
-              </a:rPr>
               <a:t>한 학기에 하나도 끝나지 않는다.</a:t>
             </a:r>
-            <a:endParaRPr lang="en-US" sz="1240" dirty="0"/>
-          </a:p>
-        </p:txBody>
-      </p:sp>
-      <p:sp>
-        <p:nvSpPr>
-          <p:cNvPr id="14" name="Text 12"/>
-          <p:cNvSpPr/>
-          <p:nvPr/>
-        </p:nvSpPr>
-        <p:spPr>
-          <a:xfrm>
-            <a:off x="5916168" y="2926080"/>
-            <a:ext cx="384048" cy="402336"/>
-          </a:xfrm>
-          <a:prstGeom prst="rect">
-            <a:avLst/>
-          </a:prstGeom>
-          <a:noFill/>
-          <a:ln/>
-        </p:spPr>
-        <p:txBody>
-          <a:bodyPr wrap="square" lIns="0" tIns="0" rIns="0" bIns="0" rtlCol="0" anchor="ctr"/>
-          <a:lstStyle/>
-          <a:p>
-            <a:pPr algn="ctr" indent="0" marL="0">
-              <a:buNone/>
-            </a:pPr>
-            <a:r>
-              <a:rPr lang="en-US" sz="2000" b="1" dirty="0">
-                <a:solidFill>
-                  <a:srgbClr val="FF5C00"/>
-                </a:solidFill>
-                <a:latin typeface="IBM Plex Sans KR" pitchFamily="34" charset="0"/>
-                <a:ea typeface="IBM Plex Sans KR" pitchFamily="34" charset="-122"/>
-                <a:cs typeface="IBM Plex Sans KR" pitchFamily="34" charset="-120"/>
-              </a:rPr>
-              <a:t>→</a:t>
-            </a:r>
-            <a:endParaRPr lang="en-US" sz="2000" dirty="0"/>
-          </a:p>
-        </p:txBody>
-      </p:sp>
-      <p:sp>
-        <p:nvSpPr>
-          <p:cNvPr id="15" name="Shape 13"/>
-          <p:cNvSpPr/>
-          <p:nvPr/>
-        </p:nvSpPr>
-        <p:spPr>
-          <a:xfrm>
-            <a:off x="6309360" y="1965960"/>
-            <a:ext cx="5349240" cy="2286000"/>
+            <a:endParaRPr lang="en-US" sz="1250" dirty="0"/>
+          </a:p>
+        </p:txBody>
+      </p:sp>
+      <p:sp>
+        <p:nvSpPr>
+          <p:cNvPr id="15" name="Shape 12"/>
+          <p:cNvSpPr/>
+          <p:nvPr/>
+        </p:nvSpPr>
+        <p:spPr>
+          <a:xfrm>
+            <a:off x="7461504" y="3639312"/>
+            <a:ext cx="4389120" cy="1572768"/>
           </a:xfrm>
           <a:prstGeom prst="roundRect">
             <a:avLst>
-              <a:gd name="adj" fmla="val 2200"/>
+              <a:gd name="adj" fmla="val 3198"/>
             </a:avLst>
           </a:prstGeom>
           <a:solidFill>
@@ -12135,14 +12091,14 @@
       </p:sp>
       <p:sp>
         <p:nvSpPr>
-          <p:cNvPr id="16" name="Text 14"/>
-          <p:cNvSpPr/>
-          <p:nvPr/>
-        </p:nvSpPr>
-        <p:spPr>
-          <a:xfrm>
-            <a:off x="6492240" y="2130552"/>
-            <a:ext cx="4983480" cy="237744"/>
+          <p:cNvPr id="16" name="Text 13"/>
+          <p:cNvSpPr/>
+          <p:nvPr/>
+        </p:nvSpPr>
+        <p:spPr>
+          <a:xfrm>
+            <a:off x="7644384" y="3803904"/>
+            <a:ext cx="4023360" cy="237744"/>
           </a:xfrm>
           <a:prstGeom prst="rect">
             <a:avLst/>
@@ -12174,14 +12130,14 @@
       </p:sp>
       <p:sp>
         <p:nvSpPr>
-          <p:cNvPr id="17" name="Text 15"/>
-          <p:cNvSpPr/>
-          <p:nvPr/>
-        </p:nvSpPr>
-        <p:spPr>
-          <a:xfrm>
-            <a:off x="6492240" y="2423160"/>
-            <a:ext cx="4983480" cy="402336"/>
+          <p:cNvPr id="17" name="Text 14"/>
+          <p:cNvSpPr/>
+          <p:nvPr/>
+        </p:nvSpPr>
+        <p:spPr>
+          <a:xfrm>
+            <a:off x="7644384" y="4096512"/>
+            <a:ext cx="4023360" cy="402336"/>
           </a:xfrm>
           <a:prstGeom prst="rect">
             <a:avLst/>
@@ -12213,14 +12169,14 @@
       </p:sp>
       <p:sp>
         <p:nvSpPr>
-          <p:cNvPr id="18" name="Text 16"/>
-          <p:cNvSpPr/>
-          <p:nvPr/>
-        </p:nvSpPr>
-        <p:spPr>
-          <a:xfrm>
-            <a:off x="6492240" y="2916936"/>
-            <a:ext cx="4983480" cy="1188720"/>
+          <p:cNvPr id="18" name="Text 15"/>
+          <p:cNvSpPr/>
+          <p:nvPr/>
+        </p:nvSpPr>
+        <p:spPr>
+          <a:xfrm>
+            <a:off x="7644384" y="4590288"/>
+            <a:ext cx="4023360" cy="475488"/>
           </a:xfrm>
           <a:prstGeom prst="rect">
             <a:avLst/>
@@ -12239,7 +12195,7 @@
               <a:buNone/>
             </a:pPr>
             <a:r>
-              <a:rPr lang="en-US" sz="1240" dirty="0">
+              <a:rPr lang="en-US" sz="1250" dirty="0">
                 <a:solidFill>
                   <a:srgbClr val="34373D"/>
                 </a:solidFill>
@@ -12249,26 +12205,36 @@
               </a:rPr>
               <a:t>그 하나가 끝까지 작동한다.</a:t>
             </a:r>
-            <a:endParaRPr lang="en-US" sz="1240" dirty="0"/>
-          </a:p>
-          <a:p>
-            <a:pPr indent="0" marL="0">
-              <a:lnSpc>
-                <a:spcPts val="1900"/>
-              </a:lnSpc>
-              <a:buNone/>
-            </a:pPr>
-            <a:endParaRPr lang="en-US" sz="1240" dirty="0"/>
-          </a:p>
-          <a:p>
-            <a:pPr indent="0" marL="0">
-              <a:lnSpc>
-                <a:spcPts val="1900"/>
-              </a:lnSpc>
-              <a:buNone/>
-            </a:pPr>
-            <a:r>
-              <a:rPr lang="en-US" sz="1240" dirty="0">
+            <a:endParaRPr lang="en-US" sz="1250" dirty="0"/>
+          </a:p>
+        </p:txBody>
+      </p:sp>
+      <p:sp>
+        <p:nvSpPr>
+          <p:cNvPr id="19" name="Text 16"/>
+          <p:cNvSpPr/>
+          <p:nvPr/>
+        </p:nvSpPr>
+        <p:spPr>
+          <a:xfrm>
+            <a:off x="530352" y="5394960"/>
+            <a:ext cx="11128248" cy="457200"/>
+          </a:xfrm>
+          <a:prstGeom prst="rect">
+            <a:avLst/>
+          </a:prstGeom>
+          <a:noFill/>
+          <a:ln/>
+        </p:spPr>
+        <p:txBody>
+          <a:bodyPr wrap="square" lIns="0" tIns="0" rIns="0" bIns="0" rtlCol="0" anchor="ctr"/>
+          <a:lstStyle/>
+          <a:p>
+            <a:pPr algn="ctr" indent="0" marL="0">
+              <a:buNone/>
+            </a:pPr>
+            <a:r>
+              <a:rPr lang="en-US" sz="1700" b="1" dirty="0">
                 <a:solidFill>
                   <a:srgbClr val="34373D"/>
                 </a:solidFill>
@@ -12276,45 +12242,6 @@
                 <a:ea typeface="IBM Plex Sans KR" pitchFamily="34" charset="-122"/>
                 <a:cs typeface="IBM Plex Sans KR" pitchFamily="34" charset="-120"/>
               </a:rPr>
-              <a:t>13회에 제출할 것도 같은 기준으로 본다.</a:t>
-            </a:r>
-            <a:endParaRPr lang="en-US" sz="1240" dirty="0"/>
-          </a:p>
-        </p:txBody>
-      </p:sp>
-      <p:sp>
-        <p:nvSpPr>
-          <p:cNvPr id="19" name="Text 17"/>
-          <p:cNvSpPr/>
-          <p:nvPr/>
-        </p:nvSpPr>
-        <p:spPr>
-          <a:xfrm>
-            <a:off x="530352" y="4709160"/>
-            <a:ext cx="11128248" cy="457200"/>
-          </a:xfrm>
-          <a:prstGeom prst="rect">
-            <a:avLst/>
-          </a:prstGeom>
-          <a:noFill/>
-          <a:ln/>
-        </p:spPr>
-        <p:txBody>
-          <a:bodyPr wrap="square" lIns="0" tIns="0" rIns="0" bIns="0" rtlCol="0" anchor="ctr"/>
-          <a:lstStyle/>
-          <a:p>
-            <a:pPr algn="ctr" indent="0" marL="0">
-              <a:buNone/>
-            </a:pPr>
-            <a:r>
-              <a:rPr lang="en-US" sz="1700" b="1" dirty="0">
-                <a:solidFill>
-                  <a:srgbClr val="34373D"/>
-                </a:solidFill>
-                <a:latin typeface="IBM Plex Sans KR" pitchFamily="34" charset="0"/>
-                <a:ea typeface="IBM Plex Sans KR" pitchFamily="34" charset="-122"/>
-                <a:cs typeface="IBM Plex Sans KR" pitchFamily="34" charset="-120"/>
-              </a:rPr>
               <a:t>기능이 많다고 좋은 기획이 아니다</a:t>
             </a:r>
             <a:endParaRPr lang="en-US" sz="1700" dirty="0"/>
@@ -12323,7 +12250,7 @@
       </p:sp>
       <p:sp>
         <p:nvSpPr>
-          <p:cNvPr id="20" name="Shape 18"/>
+          <p:cNvPr id="20" name="Shape 17"/>
           <p:cNvSpPr/>
           <p:nvPr/>
         </p:nvSpPr>
@@ -12350,7 +12277,7 @@
       </p:sp>
       <p:sp>
         <p:nvSpPr>
-          <p:cNvPr id="21" name="Text 19"/>
+          <p:cNvPr id="21" name="Text 18"/>
           <p:cNvSpPr/>
           <p:nvPr/>
         </p:nvSpPr>

--- a/06/ppt/06-1_서비스_기획의_기초_v1.pptx
+++ b/06/ppt/06-1_서비스_기획의_기초_v1.pptx
@@ -8771,7 +8771,7 @@
                 <a:ea typeface="IBM Plex Sans KR" pitchFamily="34" charset="-122"/>
                 <a:cs typeface="IBM Plex Sans KR" pitchFamily="34" charset="-120"/>
               </a:rPr>
-              <a:t>마지막 줄을 빠뜨리면 학생은 아무 일도 안 일어나는 화면을 보게 된다</a:t>
+              <a:t>마지막 줄을 빠뜨리면 쓰는 사람은 아무 일도 안 일어나는 화면을 보게 된다</a:t>
             </a:r>
             <a:endParaRPr lang="en-US" sz="1400" dirty="0"/>
           </a:p>
